--- a/Aula08_Transformacao/Aula08_Teoria.pptx
+++ b/Aula08_Transformacao/Aula08_Teoria.pptx
@@ -2320,6 +2320,10 @@
           </a:solidFill>
           <a:ln/>
         </p:spPr>
+        <p:txBody>
+          <a:bodyPr/>
+          <a:p/>
+        </p:txBody>
       </p:sp>
       <p:sp>
         <p:nvSpPr>
@@ -2342,6 +2346,10 @@
           </a:solidFill>
           <a:ln/>
         </p:spPr>
+        <p:txBody>
+          <a:bodyPr/>
+          <a:p/>
+        </p:txBody>
       </p:sp>
       <p:sp>
         <p:nvSpPr>
@@ -2362,6 +2370,10 @@
           </a:solidFill>
           <a:ln/>
         </p:spPr>
+        <p:txBody>
+          <a:bodyPr/>
+          <a:p/>
+        </p:txBody>
       </p:sp>
       <p:pic>
         <p:nvPicPr>
@@ -2675,6 +2687,10 @@
           </a:solidFill>
           <a:ln/>
         </p:spPr>
+        <p:txBody>
+          <a:bodyPr/>
+          <a:p/>
+        </p:txBody>
       </p:sp>
       <p:sp>
         <p:nvSpPr>
@@ -2913,6 +2929,10 @@
           </a:solidFill>
           <a:ln/>
         </p:spPr>
+        <p:txBody>
+          <a:bodyPr/>
+          <a:p/>
+        </p:txBody>
       </p:sp>
       <p:sp>
         <p:nvSpPr>
@@ -3665,6 +3685,10 @@
           </a:solidFill>
           <a:ln/>
         </p:spPr>
+        <p:txBody>
+          <a:bodyPr/>
+          <a:p/>
+        </p:txBody>
       </p:sp>
       <p:sp>
         <p:nvSpPr>
@@ -3769,7 +3793,7 @@
                 <a:ea typeface="Calibri" pitchFamily="34" charset="-122"/>
                 <a:cs typeface="Calibri" pitchFamily="34" charset="-120"/>
               </a:rPr>
-              <a:t>Relato: explicitar variáveis, relações e restrições.</a:t>
+              <a:t>Explicitar variáveis, relações e restrições.</a:t>
             </a:r>
             <a:endParaRPr lang="en-US" sz="1100" dirty="0"/>
           </a:p>
@@ -3793,7 +3817,7 @@
                 <a:ea typeface="Calibri" pitchFamily="34" charset="-122"/>
                 <a:cs typeface="Calibri" pitchFamily="34" charset="-120"/>
               </a:rPr>
-              <a:t>Queiroz: a análise qualitativa observa invariantes e relações mobilizadas na ação.</a:t>
+              <a:t>A análise qualitativa observa invariantes e relações mobilizadas na ação.</a:t>
             </a:r>
             <a:endParaRPr lang="en-US" sz="1100" dirty="0"/>
           </a:p>
@@ -3817,7 +3841,7 @@
                 <a:ea typeface="Calibri" pitchFamily="34" charset="-122"/>
                 <a:cs typeface="Calibri" pitchFamily="34" charset="-120"/>
               </a:rPr>
-              <a:t>Wessels: listas, tabelas e gráficos comunicam histórias diferentes dos dados.</a:t>
+              <a:t>Listas, tabelas e gráficos comunicam histórias diferentes dos dados.</a:t>
             </a:r>
             <a:endParaRPr lang="en-US" sz="1100" dirty="0"/>
           </a:p>
@@ -3844,6 +3868,10 @@
           </a:solidFill>
           <a:ln/>
         </p:spPr>
+        <p:txBody>
+          <a:bodyPr/>
+          <a:p/>
+        </p:txBody>
       </p:sp>
       <p:sp>
         <p:nvSpPr>
@@ -4136,6 +4164,10 @@
           </a:solidFill>
           <a:ln/>
         </p:spPr>
+        <p:txBody>
+          <a:bodyPr/>
+          <a:p/>
+        </p:txBody>
       </p:sp>
       <p:sp>
         <p:nvSpPr>
@@ -4374,6 +4406,10 @@
           </a:solidFill>
           <a:ln/>
         </p:spPr>
+        <p:txBody>
+          <a:bodyPr/>
+          <a:p/>
+        </p:txBody>
       </p:sp>
       <p:sp>
         <p:nvSpPr>
@@ -5109,6 +5145,10 @@
           </a:solidFill>
           <a:ln/>
         </p:spPr>
+        <p:txBody>
+          <a:bodyPr/>
+          <a:p/>
+        </p:txBody>
       </p:sp>
       <p:sp>
         <p:nvSpPr>
@@ -5213,7 +5253,7 @@
                 <a:ea typeface="Calibri" pitchFamily="34" charset="-122"/>
                 <a:cs typeface="Calibri" pitchFamily="34" charset="-120"/>
               </a:rPr>
-              <a:t>Wessels: transnumeração torna dados interpretáveis em nova forma.</a:t>
+              <a:t>Transnumeração torna dados interpretáveis em nova forma.</a:t>
             </a:r>
             <a:endParaRPr lang="en-US" sz="1100" dirty="0"/>
           </a:p>
@@ -5237,7 +5277,7 @@
                 <a:ea typeface="Calibri" pitchFamily="34" charset="-122"/>
                 <a:cs typeface="Calibri" pitchFamily="34" charset="-120"/>
               </a:rPr>
-              <a:t>Queiroz: múltiplas expressões exibem aspectos distintos do mesmo conceito.</a:t>
+              <a:t>Múltiplas expressões exibem aspectos distintos do mesmo conceito.</a:t>
             </a:r>
             <a:endParaRPr lang="en-US" sz="1100" dirty="0"/>
           </a:p>
@@ -5261,7 +5301,7 @@
                 <a:ea typeface="Calibri" pitchFamily="34" charset="-122"/>
                 <a:cs typeface="Calibri" pitchFamily="34" charset="-120"/>
               </a:rPr>
-              <a:t>Relato: articular código, texto, tabela, gráfico e interpretação.</a:t>
+              <a:t>Articular código, texto, tabela, gráfico e interpretação.</a:t>
             </a:r>
             <a:endParaRPr lang="en-US" sz="1100" dirty="0"/>
           </a:p>
@@ -5288,6 +5328,10 @@
           </a:solidFill>
           <a:ln/>
         </p:spPr>
+        <p:txBody>
+          <a:bodyPr/>
+          <a:p/>
+        </p:txBody>
       </p:sp>
       <p:sp>
         <p:nvSpPr>
@@ -5580,6 +5624,10 @@
           </a:solidFill>
           <a:ln/>
         </p:spPr>
+        <p:txBody>
+          <a:bodyPr/>
+          <a:p/>
+        </p:txBody>
       </p:sp>
       <p:sp>
         <p:nvSpPr>
@@ -5818,6 +5866,10 @@
           </a:solidFill>
           <a:ln/>
         </p:spPr>
+        <p:txBody>
+          <a:bodyPr/>
+          <a:p/>
+        </p:txBody>
       </p:sp>
       <p:sp>
         <p:nvSpPr>
@@ -6559,6 +6611,10 @@
           </a:solidFill>
           <a:ln/>
         </p:spPr>
+        <p:txBody>
+          <a:bodyPr/>
+          <a:p/>
+        </p:txBody>
       </p:sp>
       <p:sp>
         <p:nvSpPr>
@@ -6663,7 +6719,7 @@
                 <a:ea typeface="Calibri" pitchFamily="34" charset="-122"/>
                 <a:cs typeface="Calibri" pitchFamily="34" charset="-120"/>
               </a:rPr>
-              <a:t>Wessels: múltiplas representações indicam modelagem mais bem-sucedida.</a:t>
+              <a:t>Múltiplas representações indicam modelagem mais bem-sucedida.</a:t>
             </a:r>
             <a:endParaRPr lang="en-US" sz="1100" dirty="0"/>
           </a:p>
@@ -6687,7 +6743,7 @@
                 <a:ea typeface="Calibri" pitchFamily="34" charset="-122"/>
                 <a:cs typeface="Calibri" pitchFamily="34" charset="-120"/>
               </a:rPr>
-              <a:t>Queiroz: representações ampliam a percepção de propriedades e relações.</a:t>
+              <a:t>Representações ampliam a percepção de propriedades e relações.</a:t>
             </a:r>
             <a:endParaRPr lang="en-US" sz="1100" dirty="0"/>
           </a:p>
@@ -6711,7 +6767,7 @@
                 <a:ea typeface="Calibri" pitchFamily="34" charset="-122"/>
                 <a:cs typeface="Calibri" pitchFamily="34" charset="-120"/>
               </a:rPr>
-              <a:t>Relato: articular código, texto, tabela, gráfico e interpretação.</a:t>
+              <a:t>Articular código, texto, tabela, gráfico e interpretação.</a:t>
             </a:r>
             <a:endParaRPr lang="en-US" sz="1100" dirty="0"/>
           </a:p>
@@ -6738,6 +6794,10 @@
           </a:solidFill>
           <a:ln/>
         </p:spPr>
+        <p:txBody>
+          <a:bodyPr/>
+          <a:p/>
+        </p:txBody>
       </p:sp>
       <p:sp>
         <p:nvSpPr>
@@ -7030,6 +7090,10 @@
           </a:solidFill>
           <a:ln/>
         </p:spPr>
+        <p:txBody>
+          <a:bodyPr/>
+          <a:p/>
+        </p:txBody>
       </p:sp>
       <p:sp>
         <p:nvSpPr>
@@ -7268,6 +7332,10 @@
           </a:solidFill>
           <a:ln/>
         </p:spPr>
+        <p:txBody>
+          <a:bodyPr/>
+          <a:p/>
+        </p:txBody>
       </p:sp>
       <p:sp>
         <p:nvSpPr>
@@ -7782,6 +7850,10 @@
           </a:solidFill>
           <a:ln/>
         </p:spPr>
+        <p:txBody>
+          <a:bodyPr/>
+          <a:p/>
+        </p:txBody>
       </p:sp>
       <p:sp>
         <p:nvSpPr>
@@ -7886,7 +7958,7 @@
                 <a:ea typeface="Calibri" pitchFamily="34" charset="-122"/>
                 <a:cs typeface="Calibri" pitchFamily="34" charset="-120"/>
               </a:rPr>
-              <a:t>Queiroz: a tarefa deve articular dimensão material e cognitiva.</a:t>
+              <a:t>A tarefa deve articular dimensão material e cognitiva.</a:t>
             </a:r>
             <a:endParaRPr lang="en-US" sz="1100" dirty="0"/>
           </a:p>
@@ -7910,7 +7982,7 @@
                 <a:ea typeface="Calibri" pitchFamily="34" charset="-122"/>
                 <a:cs typeface="Calibri" pitchFamily="34" charset="-120"/>
               </a:rPr>
-              <a:t>Relato: incluir revisão, depuração e reconstrução.</a:t>
+              <a:t>Incluir revisão, depuração e reconstrução.</a:t>
             </a:r>
             <a:endParaRPr lang="en-US" sz="1100" dirty="0"/>
           </a:p>
@@ -7934,7 +8006,7 @@
                 <a:ea typeface="Calibri" pitchFamily="34" charset="-122"/>
                 <a:cs typeface="Calibri" pitchFamily="34" charset="-120"/>
               </a:rPr>
-              <a:t>Wessels: níveis SOLO ajudam a observar respostas de menor a maior integração.</a:t>
+              <a:t>Níveis SOLO ajudam a observar respostas de menor a maior integração.</a:t>
             </a:r>
             <a:endParaRPr lang="en-US" sz="1100" dirty="0"/>
           </a:p>
@@ -7961,6 +8033,10 @@
           </a:solidFill>
           <a:ln/>
         </p:spPr>
+        <p:txBody>
+          <a:bodyPr/>
+          <a:p/>
+        </p:txBody>
       </p:sp>
       <p:sp>
         <p:nvSpPr>
@@ -8253,6 +8329,10 @@
           </a:solidFill>
           <a:ln/>
         </p:spPr>
+        <p:txBody>
+          <a:bodyPr/>
+          <a:p/>
+        </p:txBody>
       </p:sp>
       <p:sp>
         <p:nvSpPr>
@@ -8491,6 +8571,10 @@
           </a:solidFill>
           <a:ln/>
         </p:spPr>
+        <p:txBody>
+          <a:bodyPr/>
+          <a:p/>
+        </p:txBody>
       </p:sp>
       <p:sp>
         <p:nvSpPr>
@@ -8872,6 +8956,10 @@
           </a:solidFill>
           <a:ln/>
         </p:spPr>
+        <p:txBody>
+          <a:bodyPr/>
+          <a:p/>
+        </p:txBody>
       </p:sp>
       <p:sp>
         <p:nvSpPr>
@@ -8976,7 +9064,7 @@
                 <a:ea typeface="Calibri" pitchFamily="34" charset="-122"/>
                 <a:cs typeface="Calibri" pitchFamily="34" charset="-120"/>
               </a:rPr>
-              <a:t>Wessels: organizar dados é componente crítico da representação.</a:t>
+              <a:t>Organizar dados é componente crítico da representação.</a:t>
             </a:r>
             <a:endParaRPr lang="en-US" sz="1100" dirty="0"/>
           </a:p>
@@ -9000,7 +9088,7 @@
                 <a:ea typeface="Calibri" pitchFamily="34" charset="-122"/>
                 <a:cs typeface="Calibri" pitchFamily="34" charset="-120"/>
               </a:rPr>
-              <a:t>Queiroz: múltiplas expressões exibem aspectos distintos do mesmo conceito.</a:t>
+              <a:t>Múltiplas expressões exibem aspectos distintos do mesmo conceito.</a:t>
             </a:r>
             <a:endParaRPr lang="en-US" sz="1100" dirty="0"/>
           </a:p>
@@ -9024,7 +9112,7 @@
                 <a:ea typeface="Calibri" pitchFamily="34" charset="-122"/>
                 <a:cs typeface="Calibri" pitchFamily="34" charset="-120"/>
               </a:rPr>
-              <a:t>Relato: articular código, texto, tabela, gráfico e interpretação.</a:t>
+              <a:t>Articular código, texto, tabela, gráfico e interpretação.</a:t>
             </a:r>
             <a:endParaRPr lang="en-US" sz="1100" dirty="0"/>
           </a:p>
@@ -9051,6 +9139,10 @@
           </a:solidFill>
           <a:ln/>
         </p:spPr>
+        <p:txBody>
+          <a:bodyPr/>
+          <a:p/>
+        </p:txBody>
       </p:sp>
       <p:sp>
         <p:nvSpPr>
@@ -9343,6 +9435,10 @@
           </a:solidFill>
           <a:ln/>
         </p:spPr>
+        <p:txBody>
+          <a:bodyPr/>
+          <a:p/>
+        </p:txBody>
       </p:sp>
       <p:sp>
         <p:nvSpPr>
@@ -9581,6 +9677,10 @@
           </a:solidFill>
           <a:ln/>
         </p:spPr>
+        <p:txBody>
+          <a:bodyPr/>
+          <a:p/>
+        </p:txBody>
       </p:sp>
       <p:sp>
         <p:nvSpPr>
@@ -10044,6 +10144,10 @@
           </a:solidFill>
           <a:ln/>
         </p:spPr>
+        <p:txBody>
+          <a:bodyPr/>
+          <a:p/>
+        </p:txBody>
       </p:sp>
       <p:sp>
         <p:nvSpPr>
@@ -10148,7 +10252,7 @@
                 <a:ea typeface="Calibri" pitchFamily="34" charset="-122"/>
                 <a:cs typeface="Calibri" pitchFamily="34" charset="-120"/>
               </a:rPr>
-              <a:t>Wessels: listas, tabelas e gráficos comunicam histórias diferentes dos dados.</a:t>
+              <a:t>Listas, tabelas e gráficos comunicam histórias diferentes dos dados.</a:t>
             </a:r>
             <a:endParaRPr lang="en-US" sz="1100" dirty="0"/>
           </a:p>
@@ -10172,7 +10276,7 @@
                 <a:ea typeface="Calibri" pitchFamily="34" charset="-122"/>
                 <a:cs typeface="Calibri" pitchFamily="34" charset="-120"/>
               </a:rPr>
-              <a:t>Queiroz: o resultado final não esgota a aprendizagem do conceito.</a:t>
+              <a:t>O resultado final não esgota a aprendizagem do conceito.</a:t>
             </a:r>
             <a:endParaRPr lang="en-US" sz="1100" dirty="0"/>
           </a:p>
@@ -10196,7 +10300,7 @@
                 <a:ea typeface="Calibri" pitchFamily="34" charset="-122"/>
                 <a:cs typeface="Calibri" pitchFamily="34" charset="-120"/>
               </a:rPr>
-              <a:t>Relato: reconhecer limites da ferramenta e do modelo.</a:t>
+              <a:t>Reconhecer limites da ferramenta e do modelo.</a:t>
             </a:r>
             <a:endParaRPr lang="en-US" sz="1100" dirty="0"/>
           </a:p>
@@ -10223,6 +10327,10 @@
           </a:solidFill>
           <a:ln/>
         </p:spPr>
+        <p:txBody>
+          <a:bodyPr/>
+          <a:p/>
+        </p:txBody>
       </p:sp>
       <p:sp>
         <p:nvSpPr>
@@ -10515,6 +10623,10 @@
           </a:solidFill>
           <a:ln/>
         </p:spPr>
+        <p:txBody>
+          <a:bodyPr/>
+          <a:p/>
+        </p:txBody>
       </p:sp>
       <p:sp>
         <p:nvSpPr>
@@ -10753,6 +10865,10 @@
           </a:solidFill>
           <a:ln/>
         </p:spPr>
+        <p:txBody>
+          <a:bodyPr/>
+          <a:p/>
+        </p:txBody>
       </p:sp>
       <p:sp>
         <p:nvSpPr>
@@ -11060,6 +11176,10 @@
           </a:solidFill>
           <a:ln/>
         </p:spPr>
+        <p:txBody>
+          <a:bodyPr/>
+          <a:p/>
+        </p:txBody>
       </p:sp>
       <p:sp>
         <p:nvSpPr>
@@ -11164,7 +11284,7 @@
                 <a:ea typeface="Calibri" pitchFamily="34" charset="-122"/>
                 <a:cs typeface="Calibri" pitchFamily="34" charset="-120"/>
               </a:rPr>
-              <a:t>Wessels: transnumeração torna dados interpretáveis em nova forma.</a:t>
+              <a:t>Transnumeração torna dados interpretáveis em nova forma.</a:t>
             </a:r>
             <a:endParaRPr lang="en-US" sz="1100" dirty="0"/>
           </a:p>
@@ -11188,7 +11308,7 @@
                 <a:ea typeface="Calibri" pitchFamily="34" charset="-122"/>
                 <a:cs typeface="Calibri" pitchFamily="34" charset="-120"/>
               </a:rPr>
-              <a:t>Queiroz: o percurso da tarefa revela mudanças no discurso e na ação.</a:t>
+              <a:t>O percurso da tarefa revela mudanças no discurso e na ação.</a:t>
             </a:r>
             <a:endParaRPr lang="en-US" sz="1100" dirty="0"/>
           </a:p>
@@ -11212,7 +11332,7 @@
                 <a:ea typeface="Calibri" pitchFamily="34" charset="-122"/>
                 <a:cs typeface="Calibri" pitchFamily="34" charset="-120"/>
               </a:rPr>
-              <a:t>Relato: avaliar o percurso de pensamento, não apenas o código final.</a:t>
+              <a:t>Avaliar o percurso de pensamento, não apenas o código final.</a:t>
             </a:r>
             <a:endParaRPr lang="en-US" sz="1100" dirty="0"/>
           </a:p>
@@ -11239,6 +11359,10 @@
           </a:solidFill>
           <a:ln/>
         </p:spPr>
+        <p:txBody>
+          <a:bodyPr/>
+          <a:p/>
+        </p:txBody>
       </p:sp>
       <p:sp>
         <p:nvSpPr>
@@ -11494,6 +11618,10 @@
           </a:solidFill>
           <a:ln/>
         </p:spPr>
+        <p:txBody>
+          <a:bodyPr/>
+          <a:p/>
+        </p:txBody>
       </p:sp>
       <p:sp>
         <p:nvSpPr>
@@ -11516,6 +11644,10 @@
           </a:solidFill>
           <a:ln/>
         </p:spPr>
+        <p:txBody>
+          <a:bodyPr/>
+          <a:p/>
+        </p:txBody>
       </p:sp>
       <p:sp>
         <p:nvSpPr>
@@ -11614,6 +11746,10 @@
           </a:solidFill>
           <a:ln/>
         </p:spPr>
+        <p:txBody>
+          <a:bodyPr/>
+          <a:p/>
+        </p:txBody>
       </p:sp>
       <p:sp>
         <p:nvSpPr>
@@ -11754,6 +11890,10 @@
           </a:solidFill>
           <a:ln/>
         </p:spPr>
+        <p:txBody>
+          <a:bodyPr/>
+          <a:p/>
+        </p:txBody>
       </p:sp>
       <p:sp>
         <p:nvSpPr>
@@ -11894,6 +12034,10 @@
           </a:solidFill>
           <a:ln/>
         </p:spPr>
+        <p:txBody>
+          <a:bodyPr/>
+          <a:p/>
+        </p:txBody>
       </p:sp>
       <p:sp>
         <p:nvSpPr>
@@ -12036,6 +12180,10 @@
           </a:solidFill>
           <a:ln/>
         </p:spPr>
+        <p:txBody>
+          <a:bodyPr/>
+          <a:p/>
+        </p:txBody>
       </p:sp>
       <p:sp>
         <p:nvSpPr>
@@ -12056,6 +12204,10 @@
           </a:solidFill>
           <a:ln/>
         </p:spPr>
+        <p:txBody>
+          <a:bodyPr/>
+          <a:p/>
+        </p:txBody>
       </p:sp>
       <p:pic>
         <p:nvPicPr>
@@ -12366,6 +12518,10 @@
           </a:solidFill>
           <a:ln/>
         </p:spPr>
+        <p:txBody>
+          <a:bodyPr/>
+          <a:p/>
+        </p:txBody>
       </p:sp>
       <p:sp>
         <p:nvSpPr>
@@ -12467,6 +12623,10 @@
           </a:solidFill>
           <a:ln/>
         </p:spPr>
+        <p:txBody>
+          <a:bodyPr/>
+          <a:p/>
+        </p:txBody>
       </p:sp>
       <p:sp>
         <p:nvSpPr>
@@ -12568,6 +12728,10 @@
           </a:solidFill>
           <a:ln/>
         </p:spPr>
+        <p:txBody>
+          <a:bodyPr/>
+          <a:p/>
+        </p:txBody>
       </p:sp>
       <p:sp>
         <p:nvSpPr>
@@ -12669,6 +12833,10 @@
           </a:solidFill>
           <a:ln/>
         </p:spPr>
+        <p:txBody>
+          <a:bodyPr/>
+          <a:p/>
+        </p:txBody>
       </p:sp>
       <p:sp>
         <p:nvSpPr>
@@ -12770,6 +12938,10 @@
           </a:solidFill>
           <a:ln/>
         </p:spPr>
+        <p:txBody>
+          <a:bodyPr/>
+          <a:p/>
+        </p:txBody>
       </p:sp>
       <p:sp>
         <p:nvSpPr>
@@ -12871,6 +13043,10 @@
           </a:solidFill>
           <a:ln/>
         </p:spPr>
+        <p:txBody>
+          <a:bodyPr/>
+          <a:p/>
+        </p:txBody>
       </p:sp>
       <p:sp>
         <p:nvSpPr>
@@ -12974,6 +13150,10 @@
           </a:solidFill>
           <a:ln/>
         </p:spPr>
+        <p:txBody>
+          <a:bodyPr/>
+          <a:p/>
+        </p:txBody>
       </p:sp>
       <p:sp>
         <p:nvSpPr>
@@ -13223,6 +13403,10 @@
           </a:solidFill>
           <a:ln/>
         </p:spPr>
+        <p:txBody>
+          <a:bodyPr/>
+          <a:p/>
+        </p:txBody>
       </p:sp>
       <p:sp>
         <p:nvSpPr>
@@ -13354,6 +13538,10 @@
           </a:solidFill>
           <a:ln/>
         </p:spPr>
+        <p:txBody>
+          <a:bodyPr/>
+          <a:p/>
+        </p:txBody>
       </p:sp>
       <p:sp>
         <p:nvSpPr>
@@ -13485,6 +13673,10 @@
           </a:solidFill>
           <a:ln/>
         </p:spPr>
+        <p:txBody>
+          <a:bodyPr/>
+          <a:p/>
+        </p:txBody>
       </p:sp>
       <p:sp>
         <p:nvSpPr>
@@ -13734,6 +13926,10 @@
           </a:solidFill>
           <a:ln/>
         </p:spPr>
+        <p:txBody>
+          <a:bodyPr/>
+          <a:p/>
+        </p:txBody>
       </p:sp>
       <p:sp>
         <p:nvSpPr>
@@ -13865,6 +14061,10 @@
           </a:solidFill>
           <a:ln/>
         </p:spPr>
+        <p:txBody>
+          <a:bodyPr/>
+          <a:p/>
+        </p:txBody>
       </p:sp>
       <p:sp>
         <p:nvSpPr>
@@ -13996,6 +14196,10 @@
           </a:solidFill>
           <a:ln/>
         </p:spPr>
+        <p:txBody>
+          <a:bodyPr/>
+          <a:p/>
+        </p:txBody>
       </p:sp>
       <p:sp>
         <p:nvSpPr>
@@ -14245,6 +14449,10 @@
           </a:solidFill>
           <a:ln/>
         </p:spPr>
+        <p:txBody>
+          <a:bodyPr/>
+          <a:p/>
+        </p:txBody>
       </p:sp>
       <p:sp>
         <p:nvSpPr>
@@ -14352,6 +14560,10 @@
           </a:solidFill>
           <a:ln/>
         </p:spPr>
+        <p:txBody>
+          <a:bodyPr/>
+          <a:p/>
+        </p:txBody>
       </p:sp>
       <p:sp>
         <p:nvSpPr>
@@ -14608,6 +14820,10 @@
           </a:solidFill>
           <a:ln/>
         </p:spPr>
+        <p:txBody>
+          <a:bodyPr/>
+          <a:p/>
+        </p:txBody>
       </p:sp>
       <p:sp>
         <p:nvSpPr>
@@ -14630,6 +14846,10 @@
           </a:solidFill>
           <a:ln/>
         </p:spPr>
+        <p:txBody>
+          <a:bodyPr/>
+          <a:p/>
+        </p:txBody>
       </p:sp>
       <p:sp>
         <p:nvSpPr>
@@ -14810,6 +15030,10 @@
           </a:solidFill>
           <a:ln/>
         </p:spPr>
+        <p:txBody>
+          <a:bodyPr/>
+          <a:p/>
+        </p:txBody>
       </p:sp>
       <p:sp>
         <p:nvSpPr>
@@ -15141,6 +15365,10 @@
           </a:solidFill>
           <a:ln/>
         </p:spPr>
+        <p:txBody>
+          <a:bodyPr/>
+          <a:p/>
+        </p:txBody>
       </p:sp>
       <p:sp>
         <p:nvSpPr>
@@ -15379,6 +15607,10 @@
           </a:solidFill>
           <a:ln/>
         </p:spPr>
+        <p:txBody>
+          <a:bodyPr/>
+          <a:p/>
+        </p:txBody>
       </p:sp>
       <p:sp>
         <p:nvSpPr>
@@ -15944,6 +16176,10 @@
           </a:solidFill>
           <a:ln/>
         </p:spPr>
+        <p:txBody>
+          <a:bodyPr/>
+          <a:p/>
+        </p:txBody>
       </p:sp>
       <p:sp>
         <p:nvSpPr>
@@ -16048,7 +16284,7 @@
                 <a:ea typeface="Calibri" pitchFamily="34" charset="-122"/>
                 <a:cs typeface="Calibri" pitchFamily="34" charset="-120"/>
               </a:rPr>
-              <a:t>Wessels: transnumeração torna dados interpretáveis em nova forma.</a:t>
+              <a:t>Transnumeração torna dados interpretáveis em nova forma.</a:t>
             </a:r>
             <a:endParaRPr lang="en-US" sz="1100" dirty="0"/>
           </a:p>
@@ -16072,7 +16308,7 @@
                 <a:ea typeface="Calibri" pitchFamily="34" charset="-122"/>
                 <a:cs typeface="Calibri" pitchFamily="34" charset="-120"/>
               </a:rPr>
-              <a:t>Queiroz: representações ampliam a percepção de propriedades e relações.</a:t>
+              <a:t>Representações ampliam a percepção de propriedades e relações.</a:t>
             </a:r>
             <a:endParaRPr lang="en-US" sz="1100" dirty="0"/>
           </a:p>
@@ -16096,7 +16332,7 @@
                 <a:ea typeface="Calibri" pitchFamily="34" charset="-122"/>
                 <a:cs typeface="Calibri" pitchFamily="34" charset="-120"/>
               </a:rPr>
-              <a:t>Relato: articular código, texto, tabela, gráfico e interpretação.</a:t>
+              <a:t>Articular código, texto, tabela, gráfico e interpretação.</a:t>
             </a:r>
             <a:endParaRPr lang="en-US" sz="1100" dirty="0"/>
           </a:p>
@@ -16123,6 +16359,10 @@
           </a:solidFill>
           <a:ln/>
         </p:spPr>
+        <p:txBody>
+          <a:bodyPr/>
+          <a:p/>
+        </p:txBody>
       </p:sp>
       <p:sp>
         <p:nvSpPr>
@@ -16415,6 +16655,10 @@
           </a:solidFill>
           <a:ln/>
         </p:spPr>
+        <p:txBody>
+          <a:bodyPr/>
+          <a:p/>
+        </p:txBody>
       </p:sp>
       <p:sp>
         <p:nvSpPr>
@@ -16653,6 +16897,10 @@
           </a:solidFill>
           <a:ln/>
         </p:spPr>
+        <p:txBody>
+          <a:bodyPr/>
+          <a:p/>
+        </p:txBody>
       </p:sp>
       <p:sp>
         <p:nvSpPr>
@@ -17388,6 +17636,10 @@
           </a:solidFill>
           <a:ln/>
         </p:spPr>
+        <p:txBody>
+          <a:bodyPr/>
+          <a:p/>
+        </p:txBody>
       </p:sp>
       <p:sp>
         <p:nvSpPr>
@@ -17492,7 +17744,7 @@
                 <a:ea typeface="Calibri" pitchFamily="34" charset="-122"/>
                 <a:cs typeface="Calibri" pitchFamily="34" charset="-120"/>
               </a:rPr>
-              <a:t>Wessels: o contexto e o tipo de dado influenciam a representação escolhida.</a:t>
+              <a:t>O contexto e o tipo de dado influenciam a representação escolhida.</a:t>
             </a:r>
             <a:endParaRPr lang="en-US" sz="1100" dirty="0"/>
           </a:p>
@@ -17516,7 +17768,7 @@
                 <a:ea typeface="Calibri" pitchFamily="34" charset="-122"/>
                 <a:cs typeface="Calibri" pitchFamily="34" charset="-120"/>
               </a:rPr>
-              <a:t>Queiroz: múltiplas expressões exibem aspectos distintos do mesmo conceito.</a:t>
+              <a:t>Múltiplas expressões exibem aspectos distintos do mesmo conceito.</a:t>
             </a:r>
             <a:endParaRPr lang="en-US" sz="1100" dirty="0"/>
           </a:p>
@@ -17540,7 +17792,7 @@
                 <a:ea typeface="Calibri" pitchFamily="34" charset="-122"/>
                 <a:cs typeface="Calibri" pitchFamily="34" charset="-120"/>
               </a:rPr>
-              <a:t>Relato: solicitar explicação do raciocínio desenvolvido.</a:t>
+              <a:t>Solicitar explicação do raciocínio desenvolvido.</a:t>
             </a:r>
             <a:endParaRPr lang="en-US" sz="1100" dirty="0"/>
           </a:p>
@@ -17567,6 +17819,10 @@
           </a:solidFill>
           <a:ln/>
         </p:spPr>
+        <p:txBody>
+          <a:bodyPr/>
+          <a:p/>
+        </p:txBody>
       </p:sp>
       <p:sp>
         <p:nvSpPr>
@@ -17859,6 +18115,10 @@
           </a:solidFill>
           <a:ln/>
         </p:spPr>
+        <p:txBody>
+          <a:bodyPr/>
+          <a:p/>
+        </p:txBody>
       </p:sp>
       <p:sp>
         <p:nvSpPr>
@@ -18097,6 +18357,10 @@
           </a:solidFill>
           <a:ln/>
         </p:spPr>
+        <p:txBody>
+          <a:bodyPr/>
+          <a:p/>
+        </p:txBody>
       </p:sp>
       <p:sp>
         <p:nvSpPr>
@@ -18883,6 +19147,10 @@
           </a:solidFill>
           <a:ln/>
         </p:spPr>
+        <p:txBody>
+          <a:bodyPr/>
+          <a:p/>
+        </p:txBody>
       </p:sp>
       <p:sp>
         <p:nvSpPr>
@@ -18987,7 +19255,7 @@
                 <a:ea typeface="Calibri" pitchFamily="34" charset="-122"/>
                 <a:cs typeface="Calibri" pitchFamily="34" charset="-120"/>
               </a:rPr>
-              <a:t>Wessels: organizar dados é componente crítico da representação.</a:t>
+              <a:t>Organizar dados é componente crítico da representação.</a:t>
             </a:r>
             <a:endParaRPr lang="en-US" sz="1100" dirty="0"/>
           </a:p>
@@ -19011,7 +19279,7 @@
                 <a:ea typeface="Calibri" pitchFamily="34" charset="-122"/>
                 <a:cs typeface="Calibri" pitchFamily="34" charset="-120"/>
               </a:rPr>
-              <a:t>Queiroz: representações ampliam a percepção de propriedades e relações.</a:t>
+              <a:t>Representações ampliam a percepção de propriedades e relações.</a:t>
             </a:r>
             <a:endParaRPr lang="en-US" sz="1100" dirty="0"/>
           </a:p>
@@ -19035,7 +19303,7 @@
                 <a:ea typeface="Calibri" pitchFamily="34" charset="-122"/>
                 <a:cs typeface="Calibri" pitchFamily="34" charset="-120"/>
               </a:rPr>
-              <a:t>Relato: articular código, texto, tabela, gráfico e interpretação.</a:t>
+              <a:t>Articular código, texto, tabela, gráfico e interpretação.</a:t>
             </a:r>
             <a:endParaRPr lang="en-US" sz="1100" dirty="0"/>
           </a:p>
@@ -19062,6 +19330,10 @@
           </a:solidFill>
           <a:ln/>
         </p:spPr>
+        <p:txBody>
+          <a:bodyPr/>
+          <a:p/>
+        </p:txBody>
       </p:sp>
       <p:sp>
         <p:nvSpPr>
